--- a/presentation/standup-week9-deck.pptx
+++ b/presentation/standup-week9-deck.pptx
@@ -2546,7 +2546,7 @@
                 <a:ea typeface="Georgia" pitchFamily="34" charset="-122"/>
                 <a:cs typeface="Georgia" pitchFamily="34" charset="-120"/>
               </a:rPr>
-              <a:t>Dylan — research synthesis &amp; structure. Pranav — audience research &amp; testing. Mohammad — technical build &amp; prototype.</a:t>
+              <a:t>Dylan — research synthesis &amp; structure. Pranav — audience research &amp; testing. Shaz — technical build &amp; prototype.</a:t>
             </a:r>
             <a:endParaRPr lang="en-US" sz="1500" dirty="0"/>
           </a:p>
